--- a/sesion2_practica/RGIM_S2_Practica_Dirigida_FluidSim.pptx
+++ b/sesion2_practica/RGIM_S2_Practica_Dirigida_FluidSim.pptx
@@ -12840,7 +12840,7 @@
         <p:txBody>
           <a:bodyPr/>
           <a:p>
-            <a:fld id="{0C5834C6-8589-4DE1-B680-46156F833A71}" type="slidenum">
+            <a:fld id="{23651996-B6A3-4229-B324-1900E336EAC9}" type="slidenum">
               <a:rPr lang="es-PE"/>
               <a:t>10</a:t>
             </a:fld>
@@ -13518,7 +13518,7 @@
         <p:txBody>
           <a:bodyPr/>
           <a:p>
-            <a:fld id="{53E08887-0369-40E2-9D4C-C26C1C30198A}" type="slidenum">
+            <a:fld id="{864A4A8E-073B-4BA4-9A5B-C9918B09086C}" type="slidenum">
               <a:rPr lang="es-PE"/>
               <a:t>11</a:t>
             </a:fld>
@@ -13793,7 +13793,7 @@
         <p:txBody>
           <a:bodyPr/>
           <a:p>
-            <a:fld id="{DED49CA8-0065-4550-81D0-D9538CFA859D}" type="slidenum">
+            <a:fld id="{300A5296-1920-4526-8A8F-899B7CA73C6D}" type="slidenum">
               <a:rPr lang="es-PE"/>
               <a:t>12</a:t>
             </a:fld>
@@ -14108,7 +14108,7 @@
         <p:txBody>
           <a:bodyPr/>
           <a:p>
-            <a:fld id="{FCAD0617-20EF-486C-9777-880FA586BAA1}" type="slidenum">
+            <a:fld id="{142098E5-6E81-4760-8C69-8C19DB866971}" type="slidenum">
               <a:rPr lang="es-PE"/>
               <a:t>14</a:t>
             </a:fld>
@@ -14772,7 +14772,7 @@
         <p:txBody>
           <a:bodyPr/>
           <a:p>
-            <a:fld id="{DFF9CD93-EDB7-45C9-80A6-50F6A74419D3}" type="slidenum">
+            <a:fld id="{AA7D27F9-F9A9-405A-87E1-31CF8CEAA5E7}" type="slidenum">
               <a:rPr lang="es-PE"/>
               <a:t>15</a:t>
             </a:fld>
@@ -15052,7 +15052,7 @@
         <p:txBody>
           <a:bodyPr/>
           <a:p>
-            <a:fld id="{ED67DD21-C12C-474A-9F55-DC15A89DBB5F}" type="slidenum">
+            <a:fld id="{F7BAD966-3EA2-4F6F-A06B-A7F96910B5BE}" type="slidenum">
               <a:rPr lang="es-PE"/>
               <a:t>16</a:t>
             </a:fld>
@@ -15716,7 +15716,7 @@
         <p:txBody>
           <a:bodyPr/>
           <a:p>
-            <a:fld id="{A65624C9-E419-4754-8042-0F1058D80232}" type="slidenum">
+            <a:fld id="{7CCA05F4-C269-43A1-9AA5-04F587EA02F0}" type="slidenum">
               <a:rPr lang="es-PE"/>
               <a:t>17</a:t>
             </a:fld>
@@ -15996,7 +15996,7 @@
         <p:txBody>
           <a:bodyPr/>
           <a:p>
-            <a:fld id="{134B7742-CD3D-4405-B4EE-866DDF2AF4C1}" type="slidenum">
+            <a:fld id="{2C950947-B5F0-4766-8BB1-5E62D9F0A48F}" type="slidenum">
               <a:rPr lang="es-PE"/>
               <a:t>18</a:t>
             </a:fld>
@@ -16660,7 +16660,7 @@
         <p:txBody>
           <a:bodyPr/>
           <a:p>
-            <a:fld id="{FAED6532-19B6-4D07-861D-2F4438081CF8}" type="slidenum">
+            <a:fld id="{27496156-AF75-4A77-84D4-3A5309227CA8}" type="slidenum">
               <a:rPr lang="es-PE"/>
               <a:t>19</a:t>
             </a:fld>
@@ -17020,7 +17020,7 @@
         <p:txBody>
           <a:bodyPr/>
           <a:p>
-            <a:fld id="{EB3A0932-1044-4C06-8CAD-FAD5FE7A12A8}" type="slidenum">
+            <a:fld id="{4316ECAF-1846-4ACB-99C5-C8113DFAC824}" type="slidenum">
               <a:rPr lang="es-PE"/>
               <a:t>20</a:t>
             </a:fld>
@@ -17196,7 +17196,7 @@
         <p:txBody>
           <a:bodyPr/>
           <a:p>
-            <a:fld id="{ADBE3F76-1854-41E0-9DE6-F8C84F751938}" type="slidenum">
+            <a:fld id="{61533905-66A7-4321-A50D-74C2FD4A4CFF}" type="slidenum">
               <a:rPr lang="es-PE"/>
               <a:t>21</a:t>
             </a:fld>
@@ -17986,7 +17986,7 @@
         <p:txBody>
           <a:bodyPr/>
           <a:p>
-            <a:fld id="{51A1B08A-B87F-433A-908E-52B0F60FB353}" type="slidenum">
+            <a:fld id="{60D4BE09-A9CE-4965-BECE-9DE9F9A7AB00}" type="slidenum">
               <a:rPr lang="es-PE"/>
               <a:t>22</a:t>
             </a:fld>
@@ -18714,7 +18714,7 @@
         <p:txBody>
           <a:bodyPr/>
           <a:p>
-            <a:fld id="{393B291E-773D-489D-BC58-50EA53593674}" type="slidenum">
+            <a:fld id="{41A3C822-92A9-438A-81DC-0A2AA3E62EA7}" type="slidenum">
               <a:rPr lang="es-PE"/>
               <a:t>3</a:t>
             </a:fld>
@@ -19490,7 +19490,7 @@
         <p:txBody>
           <a:bodyPr/>
           <a:p>
-            <a:fld id="{D236522D-5860-4EFB-B25E-8F20522D7CF9}" type="slidenum">
+            <a:fld id="{1A6118CB-60A3-4242-AFC3-7A17A1A5EA58}" type="slidenum">
               <a:rPr lang="es-PE"/>
               <a:t>5</a:t>
             </a:fld>
@@ -20546,7 +20546,7 @@
         <p:txBody>
           <a:bodyPr/>
           <a:p>
-            <a:fld id="{C5F88FDC-C69B-47B2-95B6-79A725F19032}" type="slidenum">
+            <a:fld id="{54E5EE41-98FD-4731-8C32-A1E297845612}" type="slidenum">
               <a:rPr lang="es-PE"/>
               <a:t>6</a:t>
             </a:fld>
@@ -20961,7 +20961,7 @@
         <p:txBody>
           <a:bodyPr/>
           <a:p>
-            <a:fld id="{D6F78108-CE78-4963-8CAE-06A46470A236}" type="slidenum">
+            <a:fld id="{016A42F8-DF39-4B5B-A6B5-760DC66BDDAC}" type="slidenum">
               <a:rPr lang="es-PE"/>
               <a:t>8</a:t>
             </a:fld>
@@ -21625,7 +21625,7 @@
         <p:txBody>
           <a:bodyPr/>
           <a:p>
-            <a:fld id="{2E943735-FCB5-43A9-B8B0-44A554BD0762}" type="slidenum">
+            <a:fld id="{5FE799F2-A79D-45A3-8EF5-4171A95EA5D9}" type="slidenum">
               <a:rPr lang="es-PE"/>
               <a:t>9</a:t>
             </a:fld>
